--- a/Software Testing/08. Load Testing Tools.pptx
+++ b/Software Testing/08. Load Testing Tools.pptx
@@ -5,10 +5,10 @@
     <p:sldMasterId id="2147483708" r:id="rId1"/>
   </p:sldMasterIdLst>
   <p:notesMasterIdLst>
-    <p:notesMasterId r:id="rId35"/>
+    <p:notesMasterId r:id="rId46"/>
   </p:notesMasterIdLst>
   <p:handoutMasterIdLst>
-    <p:handoutMasterId r:id="rId36"/>
+    <p:handoutMasterId r:id="rId47"/>
   </p:handoutMasterIdLst>
   <p:sldIdLst>
     <p:sldId id="256" r:id="rId2"/>
@@ -43,7 +43,18 @@
     <p:sldId id="691" r:id="rId31"/>
     <p:sldId id="692" r:id="rId32"/>
     <p:sldId id="693" r:id="rId33"/>
-    <p:sldId id="343" r:id="rId34"/>
+    <p:sldId id="695" r:id="rId34"/>
+    <p:sldId id="697" r:id="rId35"/>
+    <p:sldId id="698" r:id="rId36"/>
+    <p:sldId id="699" r:id="rId37"/>
+    <p:sldId id="700" r:id="rId38"/>
+    <p:sldId id="701" r:id="rId39"/>
+    <p:sldId id="702" r:id="rId40"/>
+    <p:sldId id="703" r:id="rId41"/>
+    <p:sldId id="704" r:id="rId42"/>
+    <p:sldId id="705" r:id="rId43"/>
+    <p:sldId id="706" r:id="rId44"/>
+    <p:sldId id="343" r:id="rId45"/>
   </p:sldIdLst>
   <p:sldSz cx="9144000" cy="6858000" type="screen4x3"/>
   <p:notesSz cx="6858000" cy="9144000"/>
@@ -258,7 +269,7 @@
             <a:fld id="{B8D8BFB5-794C-4D8F-A7A0-447467B3BA6F}" type="datetimeFigureOut">
               <a:rPr lang="en-US" smtClean="0"/>
               <a:pPr/>
-              <a:t>4/1/2025</a:t>
+              <a:t>7/15/2026</a:t>
             </a:fld>
             <a:endParaRPr lang="en-US"/>
           </a:p>
@@ -420,7 +431,7 @@
             <a:fld id="{6333D5C3-0820-4FAB-ABA1-6D9651D57222}" type="datetimeFigureOut">
               <a:rPr lang="en-US" smtClean="0"/>
               <a:pPr/>
-              <a:t>4/1/2025</a:t>
+              <a:t>7/15/2026</a:t>
             </a:fld>
             <a:endParaRPr lang="en-US"/>
           </a:p>
@@ -877,7 +888,7 @@
               <a:pPr>
                 <a:defRPr/>
               </a:pPr>
-              <a:t>4/1/2025</a:t>
+              <a:t>7/15/2026</a:t>
             </a:fld>
             <a:endParaRPr lang="en-US"/>
           </a:p>
@@ -1069,7 +1080,7 @@
               <a:pPr>
                 <a:defRPr/>
               </a:pPr>
-              <a:t>4/1/2025</a:t>
+              <a:t>7/15/2026</a:t>
             </a:fld>
             <a:endParaRPr lang="en-US"/>
           </a:p>
@@ -1271,7 +1282,7 @@
               <a:pPr>
                 <a:defRPr/>
               </a:pPr>
-              <a:t>4/1/2025</a:t>
+              <a:t>7/15/2026</a:t>
             </a:fld>
             <a:endParaRPr lang="en-US"/>
           </a:p>
@@ -1463,7 +1474,7 @@
               <a:pPr>
                 <a:defRPr/>
               </a:pPr>
-              <a:t>4/1/2025</a:t>
+              <a:t>7/15/2026</a:t>
             </a:fld>
             <a:endParaRPr lang="en-US"/>
           </a:p>
@@ -1731,7 +1742,7 @@
               <a:pPr>
                 <a:defRPr/>
               </a:pPr>
-              <a:t>4/1/2025</a:t>
+              <a:t>7/15/2026</a:t>
             </a:fld>
             <a:endParaRPr lang="en-US"/>
           </a:p>
@@ -2041,7 +2052,7 @@
               <a:pPr>
                 <a:defRPr/>
               </a:pPr>
-              <a:t>4/1/2025</a:t>
+              <a:t>7/15/2026</a:t>
             </a:fld>
             <a:endParaRPr lang="en-US"/>
           </a:p>
@@ -2485,7 +2496,7 @@
               <a:pPr>
                 <a:defRPr/>
               </a:pPr>
-              <a:t>4/1/2025</a:t>
+              <a:t>7/15/2026</a:t>
             </a:fld>
             <a:endParaRPr lang="en-US"/>
           </a:p>
@@ -2625,7 +2636,7 @@
               <a:pPr>
                 <a:defRPr/>
               </a:pPr>
-              <a:t>4/1/2025</a:t>
+              <a:t>7/15/2026</a:t>
             </a:fld>
             <a:endParaRPr lang="en-US"/>
           </a:p>
@@ -2742,7 +2753,7 @@
               <a:pPr>
                 <a:defRPr/>
               </a:pPr>
-              <a:t>4/1/2025</a:t>
+              <a:t>7/15/2026</a:t>
             </a:fld>
             <a:endParaRPr lang="en-US"/>
           </a:p>
@@ -3041,7 +3052,7 @@
               <a:pPr>
                 <a:defRPr/>
               </a:pPr>
-              <a:t>4/1/2025</a:t>
+              <a:t>7/15/2026</a:t>
             </a:fld>
             <a:endParaRPr lang="en-US"/>
           </a:p>
@@ -3319,7 +3330,7 @@
               <a:pPr>
                 <a:defRPr/>
               </a:pPr>
-              <a:t>4/1/2025</a:t>
+              <a:t>7/15/2026</a:t>
             </a:fld>
             <a:endParaRPr lang="en-US"/>
           </a:p>
@@ -3567,7 +3578,7 @@
               <a:pPr>
                 <a:defRPr/>
               </a:pPr>
-              <a:t>4/1/2025</a:t>
+              <a:t>7/15/2026</a:t>
             </a:fld>
             <a:endParaRPr lang="en-US"/>
           </a:p>
@@ -5616,47 +5627,7 @@
                   <a:srgbClr val="C00000"/>
                 </a:solidFill>
               </a:rPr>
-              <a:t>Use SOAPUI to Generate SOAP Message from </a:t>
-            </a:r>
-            <a:r>
-              <a:rPr lang="en-US" sz="1800" b="1" dirty="0" smtClean="0">
-                <a:solidFill>
-                  <a:srgbClr val="C00000"/>
-                </a:solidFill>
-              </a:rPr>
-              <a:t>WSDL. </a:t>
-            </a:r>
-            <a:r>
-              <a:rPr lang="en-US" sz="1800" b="1" dirty="0" smtClean="0">
-                <a:solidFill>
-                  <a:srgbClr val="C00000"/>
-                </a:solidFill>
-              </a:rPr>
-              <a:t>This is </a:t>
-            </a:r>
-            <a:r>
-              <a:rPr lang="en-US" sz="1800" b="1" dirty="0" smtClean="0">
-                <a:solidFill>
-                  <a:srgbClr val="C00000"/>
-                </a:solidFill>
-              </a:rPr>
-              <a:t>important </a:t>
-            </a:r>
-            <a:r>
-              <a:rPr lang="en-US" sz="1800" b="1" dirty="0" smtClean="0">
-                <a:solidFill>
-                  <a:srgbClr val="C00000"/>
-                </a:solidFill>
-              </a:rPr>
-              <a:t>because an </a:t>
-            </a:r>
-            <a:r>
-              <a:rPr lang="en-US" sz="1800" b="1" dirty="0" smtClean="0">
-                <a:solidFill>
-                  <a:srgbClr val="C00000"/>
-                </a:solidFill>
-              </a:rPr>
-              <a:t>incompatible SOAP request may cause strange returns, not errors.</a:t>
+              <a:t>Use SOAPUI to Generate SOAP Message from WSDL. This is important because an incompatible SOAP request may cause strange returns, not errors.</a:t>
             </a:r>
             <a:endParaRPr lang="en-US" sz="1800" b="1" dirty="0">
               <a:solidFill>
@@ -5848,19 +5819,11 @@
           <a:p>
             <a:r>
               <a:rPr lang="en-US" sz="2200" b="1" dirty="0" smtClean="0"/>
-              <a:t>Lower </a:t>
-            </a:r>
-            <a:r>
-              <a:rPr lang="en-US" sz="2200" b="1" dirty="0" smtClean="0"/>
-              <a:t>Resource Consumption</a:t>
+              <a:t>Lower Resource Consumption</a:t>
             </a:r>
             <a:r>
               <a:rPr lang="en-US" sz="2200" dirty="0" smtClean="0"/>
-              <a:t>: The GUI consumes significant CPU and memory, which can interfere with test execution</a:t>
-            </a:r>
-            <a:r>
-              <a:rPr lang="en-US" sz="2200" dirty="0" smtClean="0"/>
-              <a:t>.</a:t>
+              <a:t>: The GUI consumes significant CPU and memory, which can interfere with test execution.</a:t>
             </a:r>
           </a:p>
           <a:p>
@@ -5870,11 +5833,7 @@
             </a:r>
             <a:r>
               <a:rPr lang="en-US" sz="2200" dirty="0" smtClean="0"/>
-              <a:t>: The GUI may introduce lags or inconsistencies due to UI rendering</a:t>
-            </a:r>
-            <a:r>
-              <a:rPr lang="en-US" sz="2200" dirty="0" smtClean="0"/>
-              <a:t>.</a:t>
+              <a:t>: The GUI may introduce lags or inconsistencies due to UI rendering.</a:t>
             </a:r>
           </a:p>
           <a:p>
@@ -5884,11 +5843,7 @@
             </a:r>
             <a:r>
               <a:rPr lang="en-US" sz="2200" dirty="0" smtClean="0"/>
-              <a:t>: CLI mode ensures that test execution is not impacted by graphical interface responsiveness</a:t>
-            </a:r>
-            <a:r>
-              <a:rPr lang="en-US" sz="2200" dirty="0" smtClean="0"/>
-              <a:t>.</a:t>
+              <a:t>: CLI mode ensures that test execution is not impacted by graphical interface responsiveness.</a:t>
             </a:r>
           </a:p>
           <a:p>
@@ -5906,11 +5861,7 @@
             </a:r>
             <a:r>
               <a:rPr lang="en-US" sz="2200" dirty="0" smtClean="0"/>
-              <a:t> distributed testing feature, allowing multiple machines to generate load</a:t>
-            </a:r>
-            <a:r>
-              <a:rPr lang="en-US" sz="2200" dirty="0" smtClean="0"/>
-              <a:t>.</a:t>
+              <a:t> distributed testing feature, allowing multiple machines to generate load.</a:t>
             </a:r>
           </a:p>
           <a:p>
@@ -5920,11 +5871,7 @@
             </a:r>
             <a:r>
               <a:rPr lang="en-US" sz="2200" dirty="0" smtClean="0"/>
-              <a:t>: CLI mode allows exporting results in various formats (CSV, XML, JSON) for deeper analysis</a:t>
-            </a:r>
-            <a:r>
-              <a:rPr lang="en-US" sz="2200" dirty="0" smtClean="0"/>
-              <a:t>.</a:t>
+              <a:t>: CLI mode allows exporting results in various formats (CSV, XML, JSON) for deeper analysis.</a:t>
             </a:r>
           </a:p>
         </p:txBody>
@@ -5972,11 +5919,7 @@
             <a:pPr algn="l"/>
             <a:r>
               <a:rPr lang="en-US" dirty="0" smtClean="0"/>
-              <a:t>1. Modify </a:t>
-            </a:r>
-            <a:r>
-              <a:rPr lang="en-US" dirty="0" smtClean="0"/>
-              <a:t>the </a:t>
+              <a:t>1. Modify the </a:t>
             </a:r>
             <a:r>
               <a:rPr lang="en-US" b="1" dirty="0" smtClean="0"/>
@@ -5992,11 +5935,7 @@
             </a:r>
             <a:r>
               <a:rPr lang="en-US" dirty="0" smtClean="0"/>
-              <a:t> batch </a:t>
-            </a:r>
-            <a:r>
-              <a:rPr lang="en-US" dirty="0" smtClean="0"/>
-              <a:t>file</a:t>
+              <a:t> batch file</a:t>
             </a:r>
             <a:endParaRPr lang="en-US" dirty="0"/>
           </a:p>
@@ -6019,22 +5958,13 @@
           <a:p>
             <a:r>
               <a:rPr lang="en-US" sz="2400" dirty="0" smtClean="0"/>
-              <a:t>For </a:t>
-            </a:r>
+              <a:t>For Windows (jmeter.bat):</a:t>
+            </a:r>
+          </a:p>
+          <a:p>
             <a:r>
               <a:rPr lang="en-US" sz="2400" dirty="0" smtClean="0"/>
-              <a:t>Windows (jmeter.bat):</a:t>
-            </a:r>
-            <a:endParaRPr lang="en-US" sz="2400" dirty="0" smtClean="0"/>
-          </a:p>
-          <a:p>
-            <a:r>
-              <a:rPr lang="en-US" sz="2400" dirty="0" smtClean="0"/>
-              <a:t>Open </a:t>
-            </a:r>
-            <a:r>
-              <a:rPr lang="en-US" sz="2400" dirty="0" smtClean="0"/>
-              <a:t>the </a:t>
+              <a:t>Open the </a:t>
             </a:r>
             <a:r>
               <a:rPr lang="en-US" sz="2400" dirty="0" err="1" smtClean="0"/>
@@ -6042,11 +5972,7 @@
             </a:r>
             <a:r>
               <a:rPr lang="en-US" sz="2400" dirty="0" smtClean="0"/>
-              <a:t> installation directory</a:t>
-            </a:r>
-            <a:r>
-              <a:rPr lang="en-US" sz="2400" dirty="0" smtClean="0"/>
-              <a:t>.</a:t>
+              <a:t> installation directory.</a:t>
             </a:r>
           </a:p>
           <a:p>
@@ -6060,11 +5986,7 @@
             </a:r>
             <a:r>
               <a:rPr lang="en-US" sz="2400" dirty="0" smtClean="0"/>
-              <a:t> the jmeter.bat file using Notepad or any text editor</a:t>
-            </a:r>
-            <a:r>
-              <a:rPr lang="en-US" sz="2400" dirty="0" smtClean="0"/>
-              <a:t>.</a:t>
+              <a:t> the jmeter.bat file using Notepad or any text editor.</a:t>
             </a:r>
           </a:p>
           <a:p>
@@ -6124,11 +6046,7 @@
             </a:r>
             <a:r>
               <a:rPr lang="en-US" sz="2400" b="1" dirty="0" smtClean="0"/>
-              <a:t>set HEAP=-</a:t>
-            </a:r>
-            <a:r>
-              <a:rPr lang="en-US" sz="2400" b="1" dirty="0" smtClean="0"/>
-              <a:t>Xms</a:t>
+              <a:t>set HEAP=-Xms</a:t>
             </a:r>
             <a:r>
               <a:rPr lang="en-US" sz="2400" b="1" dirty="0" smtClean="0">
@@ -6140,15 +6058,7 @@
             </a:r>
             <a:r>
               <a:rPr lang="en-US" sz="2400" b="1" dirty="0" smtClean="0"/>
-              <a:t> </a:t>
-            </a:r>
-            <a:r>
-              <a:rPr lang="en-US" sz="2400" b="1" dirty="0" smtClean="0"/>
-              <a:t>-</a:t>
-            </a:r>
-            <a:r>
-              <a:rPr lang="en-US" sz="2400" b="1" dirty="0" smtClean="0"/>
-              <a:t>Xmx</a:t>
+              <a:t> -Xmx</a:t>
             </a:r>
             <a:r>
               <a:rPr lang="en-US" sz="2400" b="1" dirty="0" smtClean="0">
@@ -6160,11 +6070,7 @@
             </a:r>
             <a:r>
               <a:rPr lang="en-US" sz="2400" b="1" dirty="0" smtClean="0"/>
-              <a:t> </a:t>
-            </a:r>
-            <a:r>
-              <a:rPr lang="en-US" sz="2400" b="1" dirty="0" smtClean="0"/>
-              <a:t>-</a:t>
+              <a:t> -</a:t>
             </a:r>
             <a:r>
               <a:rPr lang="en-US" sz="2400" b="1" dirty="0" err="1" smtClean="0"/>
@@ -6276,7 +6182,6 @@
               <a:rPr lang="pt-BR" sz="2400" dirty="0" smtClean="0"/>
               <a:t>cd C:\Users\sfuadmin\Downloads\apache-jmeter-5.6.3\bin</a:t>
             </a:r>
-            <a:endParaRPr lang="pt-BR" sz="2400" dirty="0" smtClean="0"/>
           </a:p>
           <a:p>
             <a:r>
@@ -6287,34 +6192,13 @@
           <a:p>
             <a:r>
               <a:rPr lang="pt-BR" sz="2400" dirty="0" smtClean="0"/>
-              <a:t>del </a:t>
-            </a:r>
+              <a:t>del results.jtl</a:t>
+            </a:r>
+          </a:p>
+          <a:p>
             <a:r>
               <a:rPr lang="pt-BR" sz="2400" dirty="0" smtClean="0"/>
-              <a:t>results.jtl</a:t>
-            </a:r>
-            <a:endParaRPr lang="pt-BR" sz="2400" dirty="0" smtClean="0"/>
-          </a:p>
-          <a:p>
-            <a:r>
-              <a:rPr lang="pt-BR" sz="2400" dirty="0" smtClean="0"/>
-              <a:t>jmeter </a:t>
-            </a:r>
-            <a:r>
-              <a:rPr lang="pt-BR" sz="2400" dirty="0" smtClean="0"/>
-              <a:t>-n -t </a:t>
-            </a:r>
-            <a:r>
-              <a:rPr lang="pt-BR" sz="2400" dirty="0" smtClean="0"/>
-              <a:t>api-soap-api-5000.jmx </a:t>
-            </a:r>
-            <a:r>
-              <a:rPr lang="pt-BR" sz="2400" dirty="0" smtClean="0"/>
-              <a:t>-l results.jtl -e -o </a:t>
-            </a:r>
-            <a:r>
-              <a:rPr lang="pt-BR" sz="2400" dirty="0" smtClean="0"/>
-              <a:t>report</a:t>
+              <a:t>jmeter -n -t api-soap-api-5000.jmx -l results.jtl -e -o report</a:t>
             </a:r>
           </a:p>
           <a:p>
@@ -6521,6 +6405,28 @@
             </a:r>
             <a:endParaRPr lang="en-US" sz="2400" dirty="0" smtClean="0"/>
           </a:p>
+          <a:p>
+            <a:pPr marL="571500" indent="-571500">
+              <a:buFont typeface="+mj-lt"/>
+              <a:buAutoNum type="romanUcPeriod"/>
+            </a:pPr>
+            <a:r>
+              <a:rPr lang="en-US" sz="2400" dirty="0" smtClean="0"/>
+              <a:t>Locust</a:t>
+            </a:r>
+            <a:endParaRPr lang="en-US" sz="2400" dirty="0" smtClean="0"/>
+          </a:p>
+          <a:p>
+            <a:pPr marL="571500" indent="-571500">
+              <a:buFont typeface="+mj-lt"/>
+              <a:buAutoNum type="romanUcPeriod"/>
+            </a:pPr>
+            <a:r>
+              <a:rPr lang="en-US" sz="2400" dirty="0" smtClean="0"/>
+              <a:t>k6</a:t>
+            </a:r>
+            <a:endParaRPr lang="en-US" sz="2400" dirty="0" smtClean="0"/>
+          </a:p>
         </p:txBody>
       </p:sp>
     </p:spTree>
@@ -6569,11 +6475,7 @@
             </a:r>
             <a:r>
               <a:rPr lang="en-US" dirty="0" smtClean="0"/>
-              <a:t> vs. </a:t>
-            </a:r>
-            <a:r>
-              <a:rPr lang="en-US" dirty="0" smtClean="0"/>
-              <a:t>Locust: Performance and Resource Usage</a:t>
+              <a:t> vs. Locust: Performance and Resource Usage</a:t>
             </a:r>
             <a:endParaRPr lang="en-US" dirty="0"/>
           </a:p>
@@ -6598,13 +6500,7 @@
               <a:rPr lang="en-US" sz="2400" dirty="0" smtClean="0">
                 <a:hlinkClick r:id="rId2"/>
               </a:rPr>
-              <a:t>https://locust.io</a:t>
-            </a:r>
-            <a:r>
-              <a:rPr lang="en-US" sz="2400" dirty="0" smtClean="0">
-                <a:hlinkClick r:id="rId2"/>
-              </a:rPr>
-              <a:t>/</a:t>
+              <a:t>https://locust.io/</a:t>
             </a:r>
             <a:endParaRPr lang="en-US" sz="2400" dirty="0" smtClean="0"/>
           </a:p>
@@ -6625,7 +6521,6 @@
               <a:rPr lang="en-US" sz="2400" dirty="0" smtClean="0"/>
               <a:t> can consume significant system resources (especially memory and CPU) when simulating a large number of users.</a:t>
             </a:r>
-            <a:endParaRPr lang="en-US" sz="2400" dirty="0" smtClean="0"/>
           </a:p>
           <a:p>
             <a:r>
@@ -6690,15 +6585,7 @@
             </a:r>
             <a:r>
               <a:rPr lang="en-US" dirty="0" smtClean="0"/>
-              <a:t> vs. Locust: </a:t>
-            </a:r>
-            <a:r>
-              <a:rPr lang="en-US" dirty="0" smtClean="0"/>
-              <a:t>Supported </a:t>
-            </a:r>
-            <a:r>
-              <a:rPr lang="en-US" dirty="0" smtClean="0"/>
-              <a:t>Protocols</a:t>
+              <a:t> vs. Locust: Supported Protocols</a:t>
             </a:r>
             <a:endParaRPr lang="en-US" dirty="0"/>
           </a:p>
@@ -6725,21 +6612,13 @@
             </a:r>
             <a:r>
               <a:rPr lang="en-US" sz="2400" dirty="0" smtClean="0"/>
-              <a:t> supports a wide range of protocols out of the box, including HTTP, HTTPS, FTP, JMS, JDBC, SOAP, REST, SMTP, POP3, </a:t>
-            </a:r>
+              <a:t> supports a wide range of protocols out of the box, including HTTP, HTTPS, FTP, JMS, JDBC, SOAP, REST, SMTP, POP3, IMAP.</a:t>
+            </a:r>
+          </a:p>
+          <a:p>
             <a:r>
               <a:rPr lang="en-US" sz="2400" dirty="0" smtClean="0"/>
-              <a:t>IMAP.</a:t>
-            </a:r>
-          </a:p>
-          <a:p>
-            <a:r>
-              <a:rPr lang="en-US" sz="2400" dirty="0" smtClean="0"/>
-              <a:t>Locust is mainly designed for HTTP-based load testing (REST APIs, web apps), though custom code can be added to support other protocols</a:t>
-            </a:r>
-            <a:r>
-              <a:rPr lang="en-US" sz="2400" dirty="0" smtClean="0"/>
-              <a:t>.</a:t>
+              <a:t>Locust is mainly designed for HTTP-based load testing (REST APIs, web apps), though custom code can be added to support other protocols.</a:t>
             </a:r>
           </a:p>
           <a:p>
@@ -6793,15 +6672,7 @@
             </a:r>
             <a:r>
               <a:rPr lang="en-US" dirty="0" smtClean="0"/>
-              <a:t> vs. Locust: </a:t>
-            </a:r>
-            <a:r>
-              <a:rPr lang="en-US" dirty="0" smtClean="0"/>
-              <a:t>Reporting </a:t>
-            </a:r>
-            <a:r>
-              <a:rPr lang="en-US" dirty="0" smtClean="0"/>
-              <a:t>and Analytics</a:t>
+              <a:t> vs. Locust: Reporting and Analytics</a:t>
             </a:r>
             <a:endParaRPr lang="en-US" dirty="0"/>
           </a:p>
@@ -6830,7 +6701,6 @@
               <a:rPr lang="en-US" sz="2400" dirty="0" smtClean="0"/>
               <a:t> provides comprehensive built-in reporting, including graphs, tables, and other visual components. It also supports generating HTML reports after a test run, which provides detailed performance data. You can export results to CSV, XML, and JTL files for further analysis.</a:t>
             </a:r>
-            <a:endParaRPr lang="en-US" sz="2400" dirty="0" smtClean="0"/>
           </a:p>
           <a:p>
             <a:r>
@@ -6845,7 +6715,6 @@
               <a:rPr lang="en-US" sz="2400" dirty="0" smtClean="0"/>
               <a:t>.</a:t>
             </a:r>
-            <a:endParaRPr lang="en-US" sz="2400" dirty="0" smtClean="0"/>
           </a:p>
         </p:txBody>
       </p:sp>
@@ -6874,43 +6743,13 @@
           <a:chExt cx="0" cy="0"/>
         </a:xfrm>
       </p:grpSpPr>
-      <p:sp>
-        <p:nvSpPr>
-          <p:cNvPr id="18434" name="Title 1"/>
-          <p:cNvSpPr>
-            <a:spLocks noGrp="1"/>
-          </p:cNvSpPr>
-          <p:nvPr>
-            <p:ph type="title"/>
-          </p:nvPr>
-        </p:nvSpPr>
-        <p:spPr/>
-        <p:txBody>
-          <a:bodyPr/>
-          <a:lstStyle/>
-          <a:p>
-            <a:pPr eaLnBrk="1" hangingPunct="1"/>
-            <a:r>
-              <a:rPr lang="en-US" dirty="0" smtClean="0"/>
-              <a:t>Thank You &amp; See </a:t>
-            </a:r>
-            <a:r>
-              <a:rPr lang="en-US" smtClean="0"/>
-              <a:t>You Again</a:t>
-            </a:r>
-            <a:endParaRPr lang="en-US" dirty="0" smtClean="0"/>
-          </a:p>
-        </p:txBody>
-      </p:sp>
       <p:pic>
         <p:nvPicPr>
-          <p:cNvPr id="5" name="Content Placeholder 4"/>
+          <p:cNvPr id="4" name="Picture 2" descr="https://lh3.ggpht.com/1IfZLL2QDSjZ0wS7sUhaMlsAOS8BBzdR3wZ1WawgRn7KZAM8nEVZYMOUM-lqQb0ikIzp=w300"/>
           <p:cNvPicPr>
-            <a:picLocks noGrp="1" noChangeAspect="1" noChangeArrowheads="1"/>
+            <a:picLocks noChangeAspect="1" noChangeArrowheads="1"/>
           </p:cNvPicPr>
-          <p:nvPr>
-            <p:ph idx="1"/>
-          </p:nvPr>
+          <p:nvPr/>
         </p:nvPicPr>
         <p:blipFill>
           <a:blip r:embed="rId2" cstate="print"/>
@@ -6919,11 +6758,14 @@
             <a:fillRect/>
           </a:stretch>
         </p:blipFill>
-        <p:spPr>
+        <p:spPr bwMode="auto">
           <a:xfrm>
-            <a:off x="1143000" y="1676400"/>
-            <a:ext cx="6810375" cy="4525963"/>
+            <a:off x="3276600" y="1905000"/>
+            <a:ext cx="2857500" cy="2857500"/>
           </a:xfrm>
+          <a:prstGeom prst="rect">
+            <a:avLst/>
+          </a:prstGeom>
           <a:noFill/>
         </p:spPr>
       </p:pic>
@@ -6932,13 +6774,622 @@
   <p:clrMapOvr>
     <a:masterClrMapping/>
   </p:clrMapOvr>
-  <p:timing>
-    <p:tnLst>
-      <p:par>
-        <p:cTn id="1" dur="indefinite" restart="never" nodeType="tmRoot"/>
-      </p:par>
-    </p:tnLst>
-  </p:timing>
+</p:sld>
+</file>
+
+<file path=ppt/slides/slide34.xml><?xml version="1.0" encoding="utf-8"?>
+<p:sld xmlns:a="http://schemas.openxmlformats.org/drawingml/2006/main" xmlns:r="http://schemas.openxmlformats.org/officeDocument/2006/relationships" xmlns:p="http://schemas.openxmlformats.org/presentationml/2006/main">
+  <p:cSld>
+    <p:spTree>
+      <p:nvGrpSpPr>
+        <p:cNvPr id="1" name=""/>
+        <p:cNvGrpSpPr/>
+        <p:nvPr/>
+      </p:nvGrpSpPr>
+      <p:grpSpPr>
+        <a:xfrm>
+          <a:off x="0" y="0"/>
+          <a:ext cx="0" cy="0"/>
+          <a:chOff x="0" y="0"/>
+          <a:chExt cx="0" cy="0"/>
+        </a:xfrm>
+      </p:grpSpPr>
+      <p:sp>
+        <p:nvSpPr>
+          <p:cNvPr id="2" name="Title 1"/>
+          <p:cNvSpPr>
+            <a:spLocks noGrp="1"/>
+          </p:cNvSpPr>
+          <p:nvPr>
+            <p:ph type="title"/>
+          </p:nvPr>
+        </p:nvSpPr>
+        <p:spPr/>
+        <p:txBody>
+          <a:bodyPr/>
+          <a:lstStyle/>
+          <a:p>
+            <a:pPr algn="l"/>
+            <a:r>
+              <a:rPr lang="en-US" dirty="0" smtClean="0"/>
+              <a:t>1. Install k6 on </a:t>
+            </a:r>
+            <a:r>
+              <a:rPr lang="en-US" dirty="0" err="1" smtClean="0"/>
+              <a:t>macOS</a:t>
+            </a:r>
+            <a:endParaRPr lang="en-US" dirty="0"/>
+          </a:p>
+        </p:txBody>
+      </p:sp>
+      <p:sp>
+        <p:nvSpPr>
+          <p:cNvPr id="3" name="Content Placeholder 2"/>
+          <p:cNvSpPr>
+            <a:spLocks noGrp="1"/>
+          </p:cNvSpPr>
+          <p:nvPr>
+            <p:ph idx="1"/>
+          </p:nvPr>
+        </p:nvSpPr>
+        <p:spPr/>
+        <p:txBody>
+          <a:bodyPr/>
+          <a:lstStyle/>
+          <a:p>
+            <a:r>
+              <a:rPr lang="en-US" dirty="0" smtClean="0">
+                <a:hlinkClick r:id="rId2"/>
+              </a:rPr>
+              <a:t>https://grafana.com/pricing/?src=k6io#k6-performance-testing</a:t>
+            </a:r>
+            <a:endParaRPr lang="en-US" dirty="0" smtClean="0"/>
+          </a:p>
+          <a:p>
+            <a:r>
+              <a:rPr lang="en-US" dirty="0" smtClean="0"/>
+              <a:t>brew install k6</a:t>
+            </a:r>
+          </a:p>
+          <a:p>
+            <a:r>
+              <a:rPr lang="en-US" dirty="0" smtClean="0"/>
+              <a:t># Go to </a:t>
+            </a:r>
+            <a:r>
+              <a:rPr lang="en-US" dirty="0" smtClean="0">
+                <a:hlinkClick r:id="rId3"/>
+              </a:rPr>
+              <a:t>https://grafana.com</a:t>
+            </a:r>
+            <a:r>
+              <a:rPr lang="en-US" dirty="0" smtClean="0"/>
+              <a:t> &gt; My Account to find a stack.</a:t>
+            </a:r>
+          </a:p>
+          <a:p>
+            <a:r>
+              <a:rPr lang="en-US" dirty="0" smtClean="0"/>
+              <a:t>k6 cloud login --token 7e8f7f6 --stack valiantgranola1655</a:t>
+            </a:r>
+          </a:p>
+          <a:p>
+            <a:endParaRPr lang="en-US" dirty="0"/>
+          </a:p>
+        </p:txBody>
+      </p:sp>
+    </p:spTree>
+  </p:cSld>
+  <p:clrMapOvr>
+    <a:masterClrMapping/>
+  </p:clrMapOvr>
+</p:sld>
+</file>
+
+<file path=ppt/slides/slide35.xml><?xml version="1.0" encoding="utf-8"?>
+<p:sld xmlns:a="http://schemas.openxmlformats.org/drawingml/2006/main" xmlns:r="http://schemas.openxmlformats.org/officeDocument/2006/relationships" xmlns:p="http://schemas.openxmlformats.org/presentationml/2006/main">
+  <p:cSld>
+    <p:spTree>
+      <p:nvGrpSpPr>
+        <p:cNvPr id="1" name=""/>
+        <p:cNvGrpSpPr/>
+        <p:nvPr/>
+      </p:nvGrpSpPr>
+      <p:grpSpPr>
+        <a:xfrm>
+          <a:off x="0" y="0"/>
+          <a:ext cx="0" cy="0"/>
+          <a:chOff x="0" y="0"/>
+          <a:chExt cx="0" cy="0"/>
+        </a:xfrm>
+      </p:grpSpPr>
+      <p:sp>
+        <p:nvSpPr>
+          <p:cNvPr id="2" name="Title 1"/>
+          <p:cNvSpPr>
+            <a:spLocks noGrp="1"/>
+          </p:cNvSpPr>
+          <p:nvPr>
+            <p:ph type="title"/>
+          </p:nvPr>
+        </p:nvSpPr>
+        <p:spPr/>
+        <p:txBody>
+          <a:bodyPr/>
+          <a:lstStyle/>
+          <a:p>
+            <a:pPr algn="l"/>
+            <a:r>
+              <a:rPr lang="en-US" dirty="0" smtClean="0"/>
+              <a:t>2. Create Script</a:t>
+            </a:r>
+            <a:endParaRPr lang="en-US" dirty="0"/>
+          </a:p>
+        </p:txBody>
+      </p:sp>
+      <p:sp>
+        <p:nvSpPr>
+          <p:cNvPr id="3" name="Content Placeholder 2"/>
+          <p:cNvSpPr>
+            <a:spLocks noGrp="1"/>
+          </p:cNvSpPr>
+          <p:nvPr>
+            <p:ph idx="1"/>
+          </p:nvPr>
+        </p:nvSpPr>
+        <p:spPr/>
+        <p:txBody>
+          <a:bodyPr/>
+          <a:lstStyle/>
+          <a:p>
+            <a:r>
+              <a:rPr lang="en-US" dirty="0" smtClean="0"/>
+              <a:t>Ask Claude Code to create one: 100 users, 10 minutes.</a:t>
+            </a:r>
+          </a:p>
+          <a:p>
+            <a:r>
+              <a:rPr lang="en-US" dirty="0" smtClean="0"/>
+              <a:t>Min # of users =?, min duration = ?</a:t>
+            </a:r>
+            <a:endParaRPr lang="en-US" dirty="0"/>
+          </a:p>
+        </p:txBody>
+      </p:sp>
+    </p:spTree>
+  </p:cSld>
+  <p:clrMapOvr>
+    <a:masterClrMapping/>
+  </p:clrMapOvr>
+</p:sld>
+</file>
+
+<file path=ppt/slides/slide36.xml><?xml version="1.0" encoding="utf-8"?>
+<p:sld xmlns:a="http://schemas.openxmlformats.org/drawingml/2006/main" xmlns:r="http://schemas.openxmlformats.org/officeDocument/2006/relationships" xmlns:p="http://schemas.openxmlformats.org/presentationml/2006/main">
+  <p:cSld>
+    <p:spTree>
+      <p:nvGrpSpPr>
+        <p:cNvPr id="1" name=""/>
+        <p:cNvGrpSpPr/>
+        <p:nvPr/>
+      </p:nvGrpSpPr>
+      <p:grpSpPr>
+        <a:xfrm>
+          <a:off x="0" y="0"/>
+          <a:ext cx="0" cy="0"/>
+          <a:chOff x="0" y="0"/>
+          <a:chExt cx="0" cy="0"/>
+        </a:xfrm>
+      </p:grpSpPr>
+      <p:sp>
+        <p:nvSpPr>
+          <p:cNvPr id="2" name="Title 1"/>
+          <p:cNvSpPr>
+            <a:spLocks noGrp="1"/>
+          </p:cNvSpPr>
+          <p:nvPr>
+            <p:ph type="title"/>
+          </p:nvPr>
+        </p:nvSpPr>
+        <p:spPr/>
+        <p:txBody>
+          <a:bodyPr/>
+          <a:lstStyle/>
+          <a:p>
+            <a:pPr algn="l"/>
+            <a:r>
+              <a:rPr lang="en-US" dirty="0" smtClean="0"/>
+              <a:t>3. Run the Script on the Cloud</a:t>
+            </a:r>
+            <a:endParaRPr lang="en-US" dirty="0"/>
+          </a:p>
+        </p:txBody>
+      </p:sp>
+      <p:sp>
+        <p:nvSpPr>
+          <p:cNvPr id="3" name="Content Placeholder 2"/>
+          <p:cNvSpPr>
+            <a:spLocks noGrp="1"/>
+          </p:cNvSpPr>
+          <p:nvPr>
+            <p:ph idx="1"/>
+          </p:nvPr>
+        </p:nvSpPr>
+        <p:spPr/>
+        <p:txBody>
+          <a:bodyPr/>
+          <a:lstStyle/>
+          <a:p>
+            <a:r>
+              <a:rPr lang="en-US" dirty="0" smtClean="0"/>
+              <a:t>k6 </a:t>
+            </a:r>
+            <a:r>
+              <a:rPr lang="en-US" b="1" dirty="0" smtClean="0"/>
+              <a:t>cloud</a:t>
+            </a:r>
+            <a:r>
+              <a:rPr lang="en-US" dirty="0" smtClean="0"/>
+              <a:t> run script.js</a:t>
+            </a:r>
+          </a:p>
+          <a:p>
+            <a:endParaRPr lang="en-US" dirty="0"/>
+          </a:p>
+        </p:txBody>
+      </p:sp>
+    </p:spTree>
+  </p:cSld>
+  <p:clrMapOvr>
+    <a:masterClrMapping/>
+  </p:clrMapOvr>
+</p:sld>
+</file>
+
+<file path=ppt/slides/slide37.xml><?xml version="1.0" encoding="utf-8"?>
+<p:sld xmlns:a="http://schemas.openxmlformats.org/drawingml/2006/main" xmlns:r="http://schemas.openxmlformats.org/officeDocument/2006/relationships" xmlns:p="http://schemas.openxmlformats.org/presentationml/2006/main">
+  <p:cSld>
+    <p:spTree>
+      <p:nvGrpSpPr>
+        <p:cNvPr id="1" name=""/>
+        <p:cNvGrpSpPr/>
+        <p:nvPr/>
+      </p:nvGrpSpPr>
+      <p:grpSpPr>
+        <a:xfrm>
+          <a:off x="0" y="0"/>
+          <a:ext cx="0" cy="0"/>
+          <a:chOff x="0" y="0"/>
+          <a:chExt cx="0" cy="0"/>
+        </a:xfrm>
+      </p:grpSpPr>
+      <p:sp>
+        <p:nvSpPr>
+          <p:cNvPr id="2" name="Title 1"/>
+          <p:cNvSpPr>
+            <a:spLocks noGrp="1"/>
+          </p:cNvSpPr>
+          <p:nvPr>
+            <p:ph type="title"/>
+          </p:nvPr>
+        </p:nvSpPr>
+        <p:spPr/>
+        <p:txBody>
+          <a:bodyPr/>
+          <a:lstStyle/>
+          <a:p>
+            <a:pPr algn="l"/>
+            <a:r>
+              <a:rPr lang="en-US" dirty="0" smtClean="0"/>
+              <a:t>4. Review the Output</a:t>
+            </a:r>
+            <a:endParaRPr lang="en-US" dirty="0"/>
+          </a:p>
+        </p:txBody>
+      </p:sp>
+      <p:sp>
+        <p:nvSpPr>
+          <p:cNvPr id="3" name="Content Placeholder 2"/>
+          <p:cNvSpPr>
+            <a:spLocks noGrp="1"/>
+          </p:cNvSpPr>
+          <p:nvPr>
+            <p:ph idx="1"/>
+          </p:nvPr>
+        </p:nvSpPr>
+        <p:spPr/>
+        <p:txBody>
+          <a:bodyPr/>
+          <a:lstStyle/>
+          <a:p>
+            <a:r>
+              <a:rPr lang="en-US" sz="2400" dirty="0" smtClean="0">
+                <a:hlinkClick r:id="rId2"/>
+              </a:rPr>
+              <a:t>https://valiantgranola1655.grafana.net/a/k6-app/runs/7719358</a:t>
+            </a:r>
+            <a:endParaRPr lang="en-US" sz="2400" dirty="0" smtClean="0"/>
+          </a:p>
+          <a:p>
+            <a:endParaRPr lang="en-US" sz="2400" dirty="0"/>
+          </a:p>
+        </p:txBody>
+      </p:sp>
+      <p:pic>
+        <p:nvPicPr>
+          <p:cNvPr id="1027" name="Picture 3"/>
+          <p:cNvPicPr>
+            <a:picLocks noChangeAspect="1" noChangeArrowheads="1"/>
+          </p:cNvPicPr>
+          <p:nvPr/>
+        </p:nvPicPr>
+        <p:blipFill>
+          <a:blip r:embed="rId3" cstate="print"/>
+          <a:srcRect/>
+          <a:stretch>
+            <a:fillRect/>
+          </a:stretch>
+        </p:blipFill>
+        <p:spPr bwMode="auto">
+          <a:xfrm>
+            <a:off x="1049338" y="3089275"/>
+            <a:ext cx="7045325" cy="2244725"/>
+          </a:xfrm>
+          <a:prstGeom prst="rect">
+            <a:avLst/>
+          </a:prstGeom>
+          <a:noFill/>
+          <a:ln w="9525">
+            <a:noFill/>
+            <a:miter lim="800000"/>
+            <a:headEnd/>
+            <a:tailEnd/>
+          </a:ln>
+        </p:spPr>
+      </p:pic>
+    </p:spTree>
+  </p:cSld>
+  <p:clrMapOvr>
+    <a:masterClrMapping/>
+  </p:clrMapOvr>
+</p:sld>
+</file>
+
+<file path=ppt/slides/slide38.xml><?xml version="1.0" encoding="utf-8"?>
+<p:sld xmlns:a="http://schemas.openxmlformats.org/drawingml/2006/main" xmlns:r="http://schemas.openxmlformats.org/officeDocument/2006/relationships" xmlns:p="http://schemas.openxmlformats.org/presentationml/2006/main">
+  <p:cSld>
+    <p:spTree>
+      <p:nvGrpSpPr>
+        <p:cNvPr id="1" name=""/>
+        <p:cNvGrpSpPr/>
+        <p:nvPr/>
+      </p:nvGrpSpPr>
+      <p:grpSpPr>
+        <a:xfrm>
+          <a:off x="0" y="0"/>
+          <a:ext cx="0" cy="0"/>
+          <a:chOff x="0" y="0"/>
+          <a:chExt cx="0" cy="0"/>
+        </a:xfrm>
+      </p:grpSpPr>
+      <p:sp>
+        <p:nvSpPr>
+          <p:cNvPr id="2" name="Title 1"/>
+          <p:cNvSpPr>
+            <a:spLocks noGrp="1"/>
+          </p:cNvSpPr>
+          <p:nvPr>
+            <p:ph type="title"/>
+          </p:nvPr>
+        </p:nvSpPr>
+        <p:spPr/>
+        <p:txBody>
+          <a:bodyPr/>
+          <a:lstStyle/>
+          <a:p>
+            <a:pPr algn="l"/>
+            <a:r>
+              <a:rPr lang="en-US" dirty="0" smtClean="0"/>
+              <a:t>5. Understand the OOM</a:t>
+            </a:r>
+            <a:endParaRPr lang="en-US" dirty="0"/>
+          </a:p>
+        </p:txBody>
+      </p:sp>
+      <p:sp>
+        <p:nvSpPr>
+          <p:cNvPr id="3" name="Content Placeholder 2"/>
+          <p:cNvSpPr>
+            <a:spLocks noGrp="1"/>
+          </p:cNvSpPr>
+          <p:nvPr>
+            <p:ph idx="1"/>
+          </p:nvPr>
+        </p:nvSpPr>
+        <p:spPr/>
+        <p:txBody>
+          <a:bodyPr/>
+          <a:lstStyle/>
+          <a:p>
+            <a:r>
+              <a:rPr lang="en-US" sz="2400" dirty="0" smtClean="0"/>
+              <a:t>When a process needs memory and the kernel has none left to give — no free RAM, nothing reclaimable, and no swap to page out to — the kernel can't just wait.</a:t>
+            </a:r>
+          </a:p>
+          <a:p>
+            <a:r>
+              <a:rPr lang="en-US" sz="2400" dirty="0" smtClean="0"/>
+              <a:t>To  avoid a total system freeze, it invokes the Out Of Memory (OOM) killer.</a:t>
+            </a:r>
+          </a:p>
+          <a:p>
+            <a:r>
+              <a:rPr lang="en-US" sz="2400" dirty="0" smtClean="0"/>
+              <a:t>The OOM killer picks a process to terminate to free memory.</a:t>
+            </a:r>
+          </a:p>
+          <a:p>
+            <a:r>
+              <a:rPr lang="en-US" sz="2400" dirty="0" smtClean="0"/>
+              <a:t>It scores every process (roughly by how much memory it's using, via </a:t>
+            </a:r>
+            <a:r>
+              <a:rPr lang="en-US" sz="2400" dirty="0" err="1" smtClean="0"/>
+              <a:t>oom_score</a:t>
+            </a:r>
+            <a:r>
+              <a:rPr lang="en-US" sz="2400" dirty="0" smtClean="0"/>
+              <a:t>) and kills the one that frees the most.</a:t>
+            </a:r>
+          </a:p>
+          <a:p>
+            <a:r>
+              <a:rPr lang="en-US" sz="2400" dirty="0" smtClean="0"/>
+              <a:t>The kill is a hard SIGKILL (signal 9) — the process is terminated instantly, no clean shutdown.</a:t>
+            </a:r>
+          </a:p>
+        </p:txBody>
+      </p:sp>
+    </p:spTree>
+  </p:cSld>
+  <p:clrMapOvr>
+    <a:masterClrMapping/>
+  </p:clrMapOvr>
+</p:sld>
+</file>
+
+<file path=ppt/slides/slide39.xml><?xml version="1.0" encoding="utf-8"?>
+<p:sld xmlns:a="http://schemas.openxmlformats.org/drawingml/2006/main" xmlns:r="http://schemas.openxmlformats.org/officeDocument/2006/relationships" xmlns:p="http://schemas.openxmlformats.org/presentationml/2006/main">
+  <p:cSld>
+    <p:spTree>
+      <p:nvGrpSpPr>
+        <p:cNvPr id="1" name=""/>
+        <p:cNvGrpSpPr/>
+        <p:nvPr/>
+      </p:nvGrpSpPr>
+      <p:grpSpPr>
+        <a:xfrm>
+          <a:off x="0" y="0"/>
+          <a:ext cx="0" cy="0"/>
+          <a:chOff x="0" y="0"/>
+          <a:chExt cx="0" cy="0"/>
+        </a:xfrm>
+      </p:grpSpPr>
+      <p:sp>
+        <p:nvSpPr>
+          <p:cNvPr id="2" name="Title 1"/>
+          <p:cNvSpPr>
+            <a:spLocks noGrp="1"/>
+          </p:cNvSpPr>
+          <p:nvPr>
+            <p:ph type="title"/>
+          </p:nvPr>
+        </p:nvSpPr>
+        <p:spPr/>
+        <p:txBody>
+          <a:bodyPr/>
+          <a:lstStyle/>
+          <a:p>
+            <a:pPr algn="l"/>
+            <a:r>
+              <a:rPr lang="en-US" dirty="0" smtClean="0"/>
+              <a:t>6. Verify the OOM</a:t>
+            </a:r>
+            <a:endParaRPr lang="en-US" dirty="0"/>
+          </a:p>
+        </p:txBody>
+      </p:sp>
+      <p:sp>
+        <p:nvSpPr>
+          <p:cNvPr id="3" name="Content Placeholder 2"/>
+          <p:cNvSpPr>
+            <a:spLocks noGrp="1"/>
+          </p:cNvSpPr>
+          <p:nvPr>
+            <p:ph idx="1"/>
+          </p:nvPr>
+        </p:nvSpPr>
+        <p:spPr/>
+        <p:txBody>
+          <a:bodyPr/>
+          <a:lstStyle/>
+          <a:p>
+            <a:r>
+              <a:rPr lang="en-US" sz="2800" dirty="0" smtClean="0"/>
+              <a:t>Ask Claude Code to record baseline (pre-test):</a:t>
+            </a:r>
+          </a:p>
+          <a:p>
+            <a:pPr lvl="1"/>
+            <a:r>
+              <a:rPr lang="en-US" sz="2400" dirty="0" smtClean="0"/>
+              <a:t>OOM kills this boot: 0.</a:t>
+            </a:r>
+          </a:p>
+          <a:p>
+            <a:pPr lvl="1"/>
+            <a:r>
+              <a:rPr lang="en-US" sz="2400" dirty="0" err="1" smtClean="0"/>
+              <a:t>MySQL</a:t>
+            </a:r>
+            <a:r>
+              <a:rPr lang="en-US" sz="2400" dirty="0" smtClean="0"/>
+              <a:t> PID: 847, 0 restarts.</a:t>
+            </a:r>
+          </a:p>
+          <a:p>
+            <a:pPr lvl="1"/>
+            <a:r>
+              <a:rPr lang="en-US" sz="2400" dirty="0" smtClean="0"/>
+              <a:t>Memory: used 1679 MB / available 2229 MB</a:t>
+            </a:r>
+          </a:p>
+          <a:p>
+            <a:pPr lvl="1"/>
+            <a:r>
+              <a:rPr lang="en-US" sz="2400" dirty="0" err="1" smtClean="0"/>
+              <a:t>MySQL</a:t>
+            </a:r>
+            <a:r>
+              <a:rPr lang="en-US" sz="2400" dirty="0" smtClean="0"/>
+              <a:t> Resident Set Size (RSS): 746 MB</a:t>
+            </a:r>
+          </a:p>
+          <a:p>
+            <a:pPr lvl="1"/>
+            <a:r>
+              <a:rPr lang="en-US" sz="2400" dirty="0" smtClean="0"/>
+              <a:t>php8.4 total: 754 MB</a:t>
+            </a:r>
+          </a:p>
+          <a:p>
+            <a:pPr lvl="1"/>
+            <a:r>
+              <a:rPr lang="en-US" sz="2400" dirty="0" smtClean="0"/>
+              <a:t>The sampler logs every 3 s for ~20 min into /</a:t>
+            </a:r>
+            <a:r>
+              <a:rPr lang="en-US" sz="2400" dirty="0" err="1" smtClean="0"/>
+              <a:t>tmp</a:t>
+            </a:r>
+            <a:r>
+              <a:rPr lang="en-US" sz="2400" dirty="0" smtClean="0"/>
+              <a:t>/oom_watch.log.</a:t>
+            </a:r>
+          </a:p>
+          <a:p>
+            <a:r>
+              <a:rPr lang="en-US" sz="2800" dirty="0" smtClean="0"/>
+              <a:t>Run a load test.</a:t>
+            </a:r>
+          </a:p>
+        </p:txBody>
+      </p:sp>
+    </p:spTree>
+  </p:cSld>
+  <p:clrMapOvr>
+    <a:masterClrMapping/>
+  </p:clrMapOvr>
 </p:sld>
 </file>
 
@@ -7033,6 +7484,507 @@
           <a:prstGeom prst="rect">
             <a:avLst/>
           </a:prstGeom>
+          <a:noFill/>
+        </p:spPr>
+      </p:pic>
+    </p:spTree>
+  </p:cSld>
+  <p:clrMapOvr>
+    <a:masterClrMapping/>
+  </p:clrMapOvr>
+  <p:timing>
+    <p:tnLst>
+      <p:par>
+        <p:cTn id="1" dur="indefinite" restart="never" nodeType="tmRoot"/>
+      </p:par>
+    </p:tnLst>
+  </p:timing>
+</p:sld>
+</file>
+
+<file path=ppt/slides/slide40.xml><?xml version="1.0" encoding="utf-8"?>
+<p:sld xmlns:a="http://schemas.openxmlformats.org/drawingml/2006/main" xmlns:r="http://schemas.openxmlformats.org/officeDocument/2006/relationships" xmlns:p="http://schemas.openxmlformats.org/presentationml/2006/main">
+  <p:cSld>
+    <p:spTree>
+      <p:nvGrpSpPr>
+        <p:cNvPr id="1" name=""/>
+        <p:cNvGrpSpPr/>
+        <p:nvPr/>
+      </p:nvGrpSpPr>
+      <p:grpSpPr>
+        <a:xfrm>
+          <a:off x="0" y="0"/>
+          <a:ext cx="0" cy="0"/>
+          <a:chOff x="0" y="0"/>
+          <a:chExt cx="0" cy="0"/>
+        </a:xfrm>
+      </p:grpSpPr>
+      <p:sp>
+        <p:nvSpPr>
+          <p:cNvPr id="2" name="Title 1"/>
+          <p:cNvSpPr>
+            <a:spLocks noGrp="1"/>
+          </p:cNvSpPr>
+          <p:nvPr>
+            <p:ph type="title"/>
+          </p:nvPr>
+        </p:nvSpPr>
+        <p:spPr/>
+        <p:txBody>
+          <a:bodyPr/>
+          <a:lstStyle/>
+          <a:p>
+            <a:pPr algn="l"/>
+            <a:r>
+              <a:rPr lang="en-US" dirty="0" smtClean="0"/>
+              <a:t>7. Run the Script Locally</a:t>
+            </a:r>
+            <a:endParaRPr lang="en-US" dirty="0"/>
+          </a:p>
+        </p:txBody>
+      </p:sp>
+      <p:sp>
+        <p:nvSpPr>
+          <p:cNvPr id="3" name="Content Placeholder 2"/>
+          <p:cNvSpPr>
+            <a:spLocks noGrp="1"/>
+          </p:cNvSpPr>
+          <p:nvPr>
+            <p:ph idx="1"/>
+          </p:nvPr>
+        </p:nvSpPr>
+        <p:spPr/>
+        <p:txBody>
+          <a:bodyPr/>
+          <a:lstStyle/>
+          <a:p>
+            <a:r>
+              <a:rPr lang="en-US" dirty="0" smtClean="0"/>
+              <a:t>k6 run script.js</a:t>
+            </a:r>
+          </a:p>
+          <a:p>
+            <a:r>
+              <a:rPr lang="en-US" dirty="0" smtClean="0"/>
+              <a:t>k6 run --out 'web-dashboard=host=0.0.0.0&amp;port=5665&amp;export=</a:t>
+            </a:r>
+            <a:r>
+              <a:rPr lang="en-US" dirty="0" err="1" smtClean="0"/>
+              <a:t>report.html&amp;open</a:t>
+            </a:r>
+            <a:r>
+              <a:rPr lang="en-US" dirty="0" smtClean="0"/>
+              <a:t>=true' script.js</a:t>
+            </a:r>
+          </a:p>
+          <a:p>
+            <a:r>
+              <a:rPr lang="en-US" dirty="0" smtClean="0"/>
+              <a:t># Open: </a:t>
+            </a:r>
+            <a:r>
+              <a:rPr lang="en-US" dirty="0" smtClean="0">
+                <a:hlinkClick r:id="rId2"/>
+              </a:rPr>
+              <a:t>http://192.168.1.45:5665</a:t>
+            </a:r>
+            <a:endParaRPr lang="en-US" dirty="0" smtClean="0"/>
+          </a:p>
+          <a:p>
+            <a:endParaRPr lang="en-US" dirty="0" smtClean="0"/>
+          </a:p>
+          <a:p>
+            <a:endParaRPr lang="en-US" dirty="0"/>
+          </a:p>
+        </p:txBody>
+      </p:sp>
+    </p:spTree>
+  </p:cSld>
+  <p:clrMapOvr>
+    <a:masterClrMapping/>
+  </p:clrMapOvr>
+</p:sld>
+</file>
+
+<file path=ppt/slides/slide41.xml><?xml version="1.0" encoding="utf-8"?>
+<p:sld xmlns:a="http://schemas.openxmlformats.org/drawingml/2006/main" xmlns:r="http://schemas.openxmlformats.org/officeDocument/2006/relationships" xmlns:p="http://schemas.openxmlformats.org/presentationml/2006/main">
+  <p:cSld>
+    <p:spTree>
+      <p:nvGrpSpPr>
+        <p:cNvPr id="1" name=""/>
+        <p:cNvGrpSpPr/>
+        <p:nvPr/>
+      </p:nvGrpSpPr>
+      <p:grpSpPr>
+        <a:xfrm>
+          <a:off x="0" y="0"/>
+          <a:ext cx="0" cy="0"/>
+          <a:chOff x="0" y="0"/>
+          <a:chExt cx="0" cy="0"/>
+        </a:xfrm>
+      </p:grpSpPr>
+      <p:sp>
+        <p:nvSpPr>
+          <p:cNvPr id="2" name="Title 1"/>
+          <p:cNvSpPr>
+            <a:spLocks noGrp="1"/>
+          </p:cNvSpPr>
+          <p:nvPr>
+            <p:ph type="title"/>
+          </p:nvPr>
+        </p:nvSpPr>
+        <p:spPr/>
+        <p:txBody>
+          <a:bodyPr/>
+          <a:lstStyle/>
+          <a:p>
+            <a:pPr algn="l"/>
+            <a:r>
+              <a:rPr lang="en-US" dirty="0" smtClean="0"/>
+              <a:t>8. Check for Memory Leaks</a:t>
+            </a:r>
+            <a:endParaRPr lang="en-US" dirty="0"/>
+          </a:p>
+        </p:txBody>
+      </p:sp>
+      <p:sp>
+        <p:nvSpPr>
+          <p:cNvPr id="3" name="Content Placeholder 2"/>
+          <p:cNvSpPr>
+            <a:spLocks noGrp="1"/>
+          </p:cNvSpPr>
+          <p:nvPr>
+            <p:ph idx="1"/>
+          </p:nvPr>
+        </p:nvSpPr>
+        <p:spPr/>
+        <p:txBody>
+          <a:bodyPr/>
+          <a:lstStyle/>
+          <a:p>
+            <a:r>
+              <a:rPr lang="en-US" dirty="0" smtClean="0"/>
+              <a:t>Investigate the memory usage of each process during the load test.</a:t>
+            </a:r>
+          </a:p>
+          <a:p>
+            <a:r>
+              <a:rPr lang="en-US" dirty="0" smtClean="0"/>
+              <a:t>If a memory leak were present, the Resident Set Size (RSS) would continue to increase as a worker processes additional requests.</a:t>
+            </a:r>
+          </a:p>
+          <a:p>
+            <a:r>
+              <a:rPr lang="en-US" dirty="0" smtClean="0"/>
+              <a:t>Instead, each worker's RSS reaches a peak within the first 30–60 seconds and then remains essentially flat for the remainder of its lifetime.</a:t>
+            </a:r>
+            <a:endParaRPr lang="en-US" dirty="0"/>
+          </a:p>
+        </p:txBody>
+      </p:sp>
+    </p:spTree>
+  </p:cSld>
+  <p:clrMapOvr>
+    <a:masterClrMapping/>
+  </p:clrMapOvr>
+</p:sld>
+</file>
+
+<file path=ppt/slides/slide42.xml><?xml version="1.0" encoding="utf-8"?>
+<p:sld xmlns:a="http://schemas.openxmlformats.org/drawingml/2006/main" xmlns:r="http://schemas.openxmlformats.org/officeDocument/2006/relationships" xmlns:p="http://schemas.openxmlformats.org/presentationml/2006/main">
+  <p:cSld>
+    <p:spTree>
+      <p:nvGrpSpPr>
+        <p:cNvPr id="1" name=""/>
+        <p:cNvGrpSpPr/>
+        <p:nvPr/>
+      </p:nvGrpSpPr>
+      <p:grpSpPr>
+        <a:xfrm>
+          <a:off x="0" y="0"/>
+          <a:ext cx="0" cy="0"/>
+          <a:chOff x="0" y="0"/>
+          <a:chExt cx="0" cy="0"/>
+        </a:xfrm>
+      </p:grpSpPr>
+      <p:sp>
+        <p:nvSpPr>
+          <p:cNvPr id="2" name="Title 1"/>
+          <p:cNvSpPr>
+            <a:spLocks noGrp="1"/>
+          </p:cNvSpPr>
+          <p:nvPr>
+            <p:ph type="title"/>
+          </p:nvPr>
+        </p:nvSpPr>
+        <p:spPr/>
+        <p:txBody>
+          <a:bodyPr/>
+          <a:lstStyle/>
+          <a:p>
+            <a:pPr algn="l"/>
+            <a:r>
+              <a:rPr lang="en-US" dirty="0" smtClean="0"/>
+              <a:t>9. Understand PHP-FPM</a:t>
+            </a:r>
+            <a:endParaRPr lang="en-US" dirty="0"/>
+          </a:p>
+        </p:txBody>
+      </p:sp>
+      <p:sp>
+        <p:nvSpPr>
+          <p:cNvPr id="3" name="Content Placeholder 2"/>
+          <p:cNvSpPr>
+            <a:spLocks noGrp="1"/>
+          </p:cNvSpPr>
+          <p:nvPr>
+            <p:ph idx="1"/>
+          </p:nvPr>
+        </p:nvSpPr>
+        <p:spPr/>
+        <p:txBody>
+          <a:bodyPr/>
+          <a:lstStyle/>
+          <a:p>
+            <a:r>
+              <a:rPr lang="en-US" sz="2400" dirty="0" smtClean="0"/>
+              <a:t>The process manager is a feature of PHP-FPM (</a:t>
+            </a:r>
+            <a:r>
+              <a:rPr lang="en-US" sz="2400" dirty="0" err="1" smtClean="0"/>
+              <a:t>FastCGI</a:t>
+            </a:r>
+            <a:r>
+              <a:rPr lang="en-US" sz="2400" dirty="0" smtClean="0"/>
+              <a:t> Process Manager), which is part of PHP itself.</a:t>
+            </a:r>
+          </a:p>
+          <a:p>
+            <a:r>
+              <a:rPr lang="en-US" sz="2400" dirty="0" smtClean="0"/>
+              <a:t>PHP-FPM decides "I want to run 5 site workers" (pm/</a:t>
+            </a:r>
+            <a:r>
+              <a:rPr lang="en-US" sz="2400" dirty="0" err="1" smtClean="0"/>
+              <a:t>max_children</a:t>
+            </a:r>
+            <a:r>
+              <a:rPr lang="en-US" sz="2400" dirty="0" smtClean="0"/>
+              <a:t>). It uses ordinary OS calls (fork) to create them — but the policy (how many, when) is entirely PHP's.</a:t>
+            </a:r>
+          </a:p>
+          <a:p>
+            <a:r>
+              <a:rPr lang="en-US" sz="2400" dirty="0" err="1" smtClean="0"/>
+              <a:t>systemd</a:t>
+            </a:r>
+            <a:r>
+              <a:rPr lang="en-US" sz="2400" dirty="0" smtClean="0"/>
+              <a:t> launches the FPM master as a service and, with our proposed </a:t>
+            </a:r>
+            <a:r>
+              <a:rPr lang="en-US" sz="2400" dirty="0" err="1" smtClean="0"/>
+              <a:t>MemoryMax</a:t>
+            </a:r>
+            <a:r>
+              <a:rPr lang="en-US" sz="2400" dirty="0" smtClean="0"/>
+              <a:t>=2000M, wraps all its workers in a </a:t>
+            </a:r>
+            <a:r>
+              <a:rPr lang="en-US" sz="2400" dirty="0" err="1" smtClean="0"/>
+              <a:t>cgroup</a:t>
+            </a:r>
+            <a:r>
+              <a:rPr lang="en-US" sz="2400" dirty="0" smtClean="0"/>
+              <a:t> — a kernel memory boundary.</a:t>
+            </a:r>
+          </a:p>
+          <a:p>
+            <a:r>
+              <a:rPr lang="en-US" sz="2400" dirty="0" smtClean="0"/>
+              <a:t>The kernel doesn't know or care about "dynamic </a:t>
+            </a:r>
+            <a:r>
+              <a:rPr lang="en-US" sz="2400" dirty="0" err="1" smtClean="0"/>
+              <a:t>vs</a:t>
+            </a:r>
+            <a:r>
+              <a:rPr lang="en-US" sz="2400" dirty="0" smtClean="0"/>
+              <a:t> </a:t>
+            </a:r>
+            <a:r>
+              <a:rPr lang="en-US" sz="2400" dirty="0" err="1" smtClean="0"/>
+              <a:t>ondemand</a:t>
+            </a:r>
+            <a:r>
+              <a:rPr lang="en-US" sz="2400" dirty="0" smtClean="0"/>
+              <a:t>"; it just enforces "this group of processes can't exceed 2.0 GB."</a:t>
+            </a:r>
+            <a:endParaRPr lang="en-US" sz="2400" dirty="0"/>
+          </a:p>
+        </p:txBody>
+      </p:sp>
+    </p:spTree>
+  </p:cSld>
+  <p:clrMapOvr>
+    <a:masterClrMapping/>
+  </p:clrMapOvr>
+</p:sld>
+</file>
+
+<file path=ppt/slides/slide43.xml><?xml version="1.0" encoding="utf-8"?>
+<p:sld xmlns:a="http://schemas.openxmlformats.org/drawingml/2006/main" xmlns:r="http://schemas.openxmlformats.org/officeDocument/2006/relationships" xmlns:p="http://schemas.openxmlformats.org/presentationml/2006/main">
+  <p:cSld>
+    <p:spTree>
+      <p:nvGrpSpPr>
+        <p:cNvPr id="1" name=""/>
+        <p:cNvGrpSpPr/>
+        <p:nvPr/>
+      </p:nvGrpSpPr>
+      <p:grpSpPr>
+        <a:xfrm>
+          <a:off x="0" y="0"/>
+          <a:ext cx="0" cy="0"/>
+          <a:chOff x="0" y="0"/>
+          <a:chExt cx="0" cy="0"/>
+        </a:xfrm>
+      </p:grpSpPr>
+      <p:sp>
+        <p:nvSpPr>
+          <p:cNvPr id="2" name="Title 1"/>
+          <p:cNvSpPr>
+            <a:spLocks noGrp="1"/>
+          </p:cNvSpPr>
+          <p:nvPr>
+            <p:ph type="title"/>
+          </p:nvPr>
+        </p:nvSpPr>
+        <p:spPr/>
+        <p:txBody>
+          <a:bodyPr/>
+          <a:lstStyle/>
+          <a:p>
+            <a:pPr algn="l"/>
+            <a:r>
+              <a:rPr lang="en-US" dirty="0" smtClean="0"/>
+              <a:t>10. Reallocate Resources</a:t>
+            </a:r>
+            <a:endParaRPr lang="en-US" dirty="0"/>
+          </a:p>
+        </p:txBody>
+      </p:sp>
+      <p:sp>
+        <p:nvSpPr>
+          <p:cNvPr id="3" name="Content Placeholder 2"/>
+          <p:cNvSpPr>
+            <a:spLocks noGrp="1"/>
+          </p:cNvSpPr>
+          <p:nvPr>
+            <p:ph idx="1"/>
+          </p:nvPr>
+        </p:nvSpPr>
+        <p:spPr/>
+        <p:txBody>
+          <a:bodyPr/>
+          <a:lstStyle/>
+          <a:p>
+            <a:r>
+              <a:rPr lang="en-US" sz="2400" dirty="0" err="1" smtClean="0"/>
+              <a:t>max_children</a:t>
+            </a:r>
+            <a:r>
+              <a:rPr lang="en-US" sz="2400" dirty="0" smtClean="0"/>
+              <a:t> = 4 for resource-intensive sites.</a:t>
+            </a:r>
+          </a:p>
+          <a:p>
+            <a:r>
+              <a:rPr lang="en-US" sz="2400" dirty="0" err="1" smtClean="0"/>
+              <a:t>max_children</a:t>
+            </a:r>
+            <a:r>
+              <a:rPr lang="en-US" sz="2400" dirty="0" smtClean="0"/>
+              <a:t> = 1 for lightweight sites.</a:t>
+            </a:r>
+            <a:endParaRPr lang="en-US" sz="2400" dirty="0"/>
+          </a:p>
+        </p:txBody>
+      </p:sp>
+    </p:spTree>
+  </p:cSld>
+  <p:clrMapOvr>
+    <a:masterClrMapping/>
+  </p:clrMapOvr>
+</p:sld>
+</file>
+
+<file path=ppt/slides/slide44.xml><?xml version="1.0" encoding="utf-8"?>
+<p:sld xmlns:a="http://schemas.openxmlformats.org/drawingml/2006/main" xmlns:r="http://schemas.openxmlformats.org/officeDocument/2006/relationships" xmlns:p="http://schemas.openxmlformats.org/presentationml/2006/main">
+  <p:cSld>
+    <p:spTree>
+      <p:nvGrpSpPr>
+        <p:cNvPr id="1" name=""/>
+        <p:cNvGrpSpPr/>
+        <p:nvPr/>
+      </p:nvGrpSpPr>
+      <p:grpSpPr>
+        <a:xfrm>
+          <a:off x="0" y="0"/>
+          <a:ext cx="0" cy="0"/>
+          <a:chOff x="0" y="0"/>
+          <a:chExt cx="0" cy="0"/>
+        </a:xfrm>
+      </p:grpSpPr>
+      <p:sp>
+        <p:nvSpPr>
+          <p:cNvPr id="18434" name="Title 1"/>
+          <p:cNvSpPr>
+            <a:spLocks noGrp="1"/>
+          </p:cNvSpPr>
+          <p:nvPr>
+            <p:ph type="title"/>
+          </p:nvPr>
+        </p:nvSpPr>
+        <p:spPr/>
+        <p:txBody>
+          <a:bodyPr/>
+          <a:lstStyle/>
+          <a:p>
+            <a:pPr eaLnBrk="1" hangingPunct="1"/>
+            <a:r>
+              <a:rPr lang="en-US" dirty="0" smtClean="0"/>
+              <a:t>Thank You &amp; See </a:t>
+            </a:r>
+            <a:r>
+              <a:rPr lang="en-US" smtClean="0"/>
+              <a:t>You Again</a:t>
+            </a:r>
+            <a:endParaRPr lang="en-US" dirty="0" smtClean="0"/>
+          </a:p>
+        </p:txBody>
+      </p:sp>
+      <p:pic>
+        <p:nvPicPr>
+          <p:cNvPr id="5" name="Content Placeholder 4"/>
+          <p:cNvPicPr>
+            <a:picLocks noGrp="1" noChangeAspect="1" noChangeArrowheads="1"/>
+          </p:cNvPicPr>
+          <p:nvPr>
+            <p:ph idx="1"/>
+          </p:nvPr>
+        </p:nvPicPr>
+        <p:blipFill>
+          <a:blip r:embed="rId2" cstate="print"/>
+          <a:srcRect/>
+          <a:stretch>
+            <a:fillRect/>
+          </a:stretch>
+        </p:blipFill>
+        <p:spPr>
+          <a:xfrm>
+            <a:off x="1143000" y="1676400"/>
+            <a:ext cx="6810375" cy="4525963"/>
+          </a:xfrm>
           <a:noFill/>
         </p:spPr>
       </p:pic>
